--- a/Slides/Semana 14/semana_14_slides.pptx
+++ b/Slides/Semana 14/semana_14_slides.pptx
@@ -517,7 +517,7 @@
           <a:p>
             <a:r>
               <a:rPr lang="en-US" dirty="0"/>
-              <a:t>Notas: Abertura da mini aula (20 min). Unidade IV — Otimização e Integração ao Motor. Crítica 🔴 FORMAL (CF5) nesta semana — vale 30% do Portfolio de Artefatos, o maior peso das cinco críticas formais realizadas até aqui, e a primeira vez que o Critério 7 (Otimização) entra em nota formal. Apostila: Parte V, Cap. 18 — Texture Atlas e Trim Sheets (conceito e workflow de trim sheets; aplicação em arquitetura modular). Mensagem central da capa: na Semana 13 o problema era agrupar OBJETOS distintos em uma textura fixa (atlas). Hoje o problema é o oposto — elementos que se REPETEM em quantidade variável (paredes, vigas, molduras, trilhos). A trim sheet é uma faixa de textura que se estica e repete via tiling ao longo de qualquer comprimento, sem nunca precisar de textura nova por segmento. Não antecipar UDIMs / channel packing (S15).</a:t>
+              <a:t>Notas: Abertura da mini aula (20 min). Unidade IV — Otimização e Integração ao Motor. Crítica 🔴 FORMAL (CF4) nesta semana — vale 30% do Portfolio de Artefatos, o maior peso entre as quatro críticas formais do PA, e a primeira vez que o Critério 7 (Otimização) entra em nota formal. Apostila: Parte V, Cap. 18 — Texture Atlas e Trim Sheets (conceito e workflow de trim sheets; aplicação em arquitetura modular). Mensagem central da capa: na Semana 13 o problema era agrupar OBJETOS distintos em uma textura fixa (atlas). Hoje o problema é o oposto — elementos que se REPETEM em quantidade variável (paredes, vigas, molduras, trilhos). A trim sheet é uma faixa de textura que se estica e repete via tiling ao longo de qualquer comprimento, sem nunca precisar de textura nova por segmento. Não antecipar UDIMs / channel packing (S15).</a:t>
             </a:r>
             <a:endParaRPr lang="en-US" dirty="0"/>
           </a:p>
@@ -698,7 +698,7 @@
           <a:p>
             <a:r>
               <a:rPr lang="en-US" dirty="0"/>
-              <a:t>Notas: Objetivo 5 do plano de aula e o coração da CF5 (C7 entra em nota pela primeira vez). "Essa é a prova concreta de otimização: a mesma textura, sem nenhuma pintura adicional, serve a duas peças de tamanhos diferentes do kit." Distorção de escala (Possíveis Dificuldades nº 4): ao aplicar a mesma trim a comprimentos diferentes, ajustar o tiling count proporcionalmente ao comprimento mantém o tamanho do motivo constante — mesma lógica de texel density entre assets da Semana 4.</a:t>
+              <a:t>Notas: Objetivo 5 do plano de aula e o coração da CF4 (C7 entra em nota pela primeira vez). "Essa é a prova concreta de otimização: a mesma textura, sem nenhuma pintura adicional, serve a duas peças de tamanhos diferentes do kit." Distorção de escala (Possíveis Dificuldades nº 4): ao aplicar a mesma trim a comprimentos diferentes, ajustar o tiling count proporcionalmente ao comprimento mantém o tamanho do motivo constante — mesma lógica de texel density entre assets da Semana 4.</a:t>
             </a:r>
             <a:endParaRPr lang="en-US" dirty="0"/>
           </a:p>
@@ -1050,7 +1050,7 @@
           <a:p>
             <a:r>
               <a:rPr lang="en-US" dirty="0"/>
-              <a:t>Notas: Amarrar a mini aula antes da demonstração. Cada item retorna na demonstração ao vivo (trim mapeada numa parede modular no 3D Coat) e no estúdio (planejar e iniciar a própria trim). Lembrar a turma: hoje é crítica 🔴 FORMAL (CF5), vale 30% do PA — o maior peso das cinco — e Otimização (C7) entra em nota pela primeira vez. O peso maior reflete confiança no progresso já demonstrado, não uma régua mais rígida.</a:t>
+              <a:t>Notas: Amarrar a mini aula antes da demonstração. Cada item retorna na demonstração ao vivo (trim mapeada numa parede modular no 3D Coat) e no estúdio (planejar e iniciar a própria trim). Lembrar a turma: hoje é crítica 🔴 FORMAL (CF4), vale 30% do PA — o maior peso entre as quatro críticas formais do PA — e Otimização (C7) entra em nota pela primeira vez. O peso maior reflete confiança no progresso já demonstrado, não uma régua mais rígida.</a:t>
             </a:r>
             <a:endParaRPr lang="en-US" dirty="0"/>
           </a:p>
@@ -1231,7 +1231,7 @@
           <a:p>
             <a:r>
               <a:rPr lang="en-US" dirty="0"/>
-              <a:t>Notas: Ler rápido. Os objetivos vêm dos itens 1 a 6 do plano de aula. Reforçar: hoje NÃO é técnica nova de pintura — é uma nova lógica de reutilização. O atlas (S13) e a trim (S14) são ferramentas complementares. O item da reutilização em mais de uma peça é a prova concreta de C7 (Otimização), avaliado formalmente pela primeira vez na CF5 de hoje.</a:t>
+              <a:t>Notas: Ler rápido. Os objetivos vêm dos itens 1 a 6 do plano de aula. Reforçar: hoje NÃO é técnica nova de pintura — é uma nova lógica de reutilização. O atlas (S13) e a trim (S14) são ferramentas complementares. O item da reutilização em mais de uma peça é a prova concreta de C7 (Otimização), avaliado formalmente pela primeira vez na CF4 de hoje.</a:t>
             </a:r>
             <a:endParaRPr lang="en-US" dirty="0"/>
           </a:p>
@@ -1588,7 +1588,7 @@
           <a:p>
             <a:r>
               <a:rPr lang="en-US" dirty="0"/>
-              <a:t>Notas: Slide-chave. As duas ferramentas são complementares, não concorrentes — um kit modular de produção real usa as duas ao mesmo tempo, escolhendo a certa para cada tipo de asset. Frase-ponte sugerida para a apresentação da CF5: "Uso o atlas quando tenho um número fixo de objetos diferentes para agrupar; uso a trim quando tenho um elemento que se repete em quantidade que eu não sei de antemão." Se a turma sair só com esta distinção, o essencial da aula foi cumprido.</a:t>
+              <a:t>Notas: Slide-chave. As duas ferramentas são complementares, não concorrentes — um kit modular de produção real usa as duas ao mesmo tempo, escolhendo a certa para cada tipo de asset. Frase-ponte sugerida para a apresentação da CF4: "Uso o atlas quando tenho um número fixo de objetos diferentes para agrupar; uso a trim quando tenho um elemento que se repete em quantidade que eu não sei de antemão." Se a turma sair só com esta distinção, o essencial da aula foi cumprido.</a:t>
             </a:r>
             <a:endParaRPr lang="en-US" dirty="0"/>
           </a:p>

--- a/Slides/Semana 14/semana_14_slides.pptx
+++ b/Slides/Semana 14/semana_14_slides.pptx
@@ -1050,7 +1050,7 @@
           <a:p>
             <a:r>
               <a:rPr lang="en-US" dirty="0"/>
-              <a:t>Notas: Amarrar a mini aula antes da demonstração. Cada item retorna na demonstração ao vivo (trim mapeada numa parede modular no 3D Coat) e no estúdio (planejar e iniciar a própria trim). Lembrar a turma: hoje é crítica 🔴 FORMAL (CF4), vale 30% do PA — o maior peso entre as quatro críticas formais do PA — e Otimização (C7) entra em nota pela primeira vez. O peso maior reflete confiança no progresso já demonstrado, não uma régua mais rígida.</a:t>
+              <a:t>Notas: Amarrar a mini aula antes da demonstração. Cada item retorna na demonstração ao vivo (trim mapeada numa parede modular no 3DCoatTextura) e no estúdio (planejar e iniciar a própria trim). Lembrar a turma: hoje é crítica 🔴 FORMAL (CF4), vale 30% do PA — o maior peso entre as quatro críticas formais do PA — e Otimização (C7) entra em nota pela primeira vez. O peso maior reflete confiança no progresso já demonstrado, não uma régua mais rígida.</a:t>
             </a:r>
             <a:endParaRPr lang="en-US" dirty="0"/>
           </a:p>
@@ -1143,7 +1143,7 @@
 Objetivo didático: antecipar o alvo visual da demonstração para que a turma reconheça o resultado esperado antes de produzir no estúdio.
 Arquivo sugerido: assets/demo_trim_parede_mapeada.webp
 Descrição: montagem de três painéis — (1) a trim sheet completa (ex.: 1024×2048) com três faixas rotuladas: madeira, metal, ornamento; (2) o UV de uma parede modular mapeado como tira estreita sobre a faixa de madeira, com marcas de repetição ao longo do comprimento; (3) a mesma trim aplicada a duas paredes de tamanhos diferentes no viewport, ambas com o padrão contínuo e sem costura.
-Como produzir: no 3D Coat, abrir a trim de demonstração com três faixas; no Blender ou no UV Room, mapear o UV da parede modular sobre a faixa de madeira com tiling configurado e capturar o UV. Aplicar a trim a duas peças de comprimentos diferentes e capturar o viewport. Compor os três painéis lado a lado no Krita com os rótulos das faixas.</a:t>
+Como produzir: no 3DCoatTextura, abrir a trim de demonstração com três faixas; no Blender, mapear o UV da parede modular sobre a faixa de madeira com tiling configurado e capturar o UV. Aplicar a trim a duas peças de comprimentos diferentes e capturar o viewport. Compor os três painéis lado a lado no Krita com os rótulos das faixas.</a:t>
             </a:r>
             <a:endParaRPr lang="en-US" dirty="0"/>
           </a:p>
